--- a/docs/PptxIndexer_Introduction.pptx
+++ b/docs/PptxIndexer_Introduction.pptx
@@ -263,7 +263,7 @@
             <a:fld id="{294670BC-B8C6-44A7-84E1-23632D8FD86F}" type="datetimeFigureOut">
               <a:rPr lang="ja-JP" altLang="en-US" smtClean="0"/>
               <a:pPr/>
-              <a:t>2025/2/21</a:t>
+              <a:t>2025/3/8</a:t>
             </a:fld>
             <a:endParaRPr lang="ja-JP" altLang="en-US"/>
           </a:p>
